--- a/templates/carousels/posts/2026-10-05-mon-teachers-day-five-mentors.pptx
+++ b/templates/carousels/posts/2026-10-05-mon-teachers-day-five-mentors.pptx
@@ -3979,7 +3979,7 @@
       <p:grpSpPr/>
       <p:pic>
         <p:nvPicPr>
-          <p:cNvPr id="2" name="Picture 1" descr="5735542674834819802.jpg"/>
+          <p:cNvPr id="2" name="Picture 1" descr="6545155998521528612.jpg"/>
           <p:cNvPicPr>
             <a:picLocks noChangeAspect="1"/>
           </p:cNvPicPr>
